--- a/public/fun/pack/pptx/news/카드뉴스_45_오늘의한마디_한지등.pptx
+++ b/public/fun/pack/pptx/news/카드뉴스_45_오늘의한마디_한지등.pptx
@@ -3287,6 +3287,14 @@
 <file path=ppt/slides/slide1.xml><?xml version="1.0" encoding="utf-8"?>
 <p:sld xmlns:a="http://schemas.openxmlformats.org/drawingml/2006/main" xmlns:p="http://schemas.openxmlformats.org/presentationml/2006/main" xmlns:r="http://schemas.openxmlformats.org/officeDocument/2006/relationships">
   <p:cSld>
+    <p:bg>
+      <p:bgPr>
+        <a:solidFill>
+          <a:srgbClr val="F6EAD5"/>
+        </a:solidFill>
+        <a:effectLst/>
+      </p:bgPr>
+    </p:bg>
     <p:spTree>
       <p:nvGrpSpPr>
         <p:cNvPr id="1" name=""/>
@@ -3294,30 +3302,102 @@
         <p:nvPr/>
       </p:nvGrpSpPr>
       <p:grpSpPr/>
-      <p:pic>
-        <p:nvPicPr>
-          <p:cNvPr id="3" name="표지 그림" descr="news-45.jpg"/>
-          <p:cNvPicPr>
-            <a:picLocks noChangeAspect="1"/>
-          </p:cNvPicPr>
+      <p:sp>
+        <p:nvSpPr>
+          <p:cNvPr id="3" name="장식"/>
+          <p:cNvSpPr/>
           <p:nvPr/>
-        </p:nvPicPr>
-        <p:blipFill>
-          <a:blip r:embed="rId2"/>
-          <a:stretch>
-            <a:fillRect/>
-          </a:stretch>
-        </p:blipFill>
-        <p:spPr>
-          <a:xfrm>
-            <a:off x="0" y="0"/>
-            <a:ext cx="6858000" cy="6858000"/>
+        </p:nvSpPr>
+        <p:spPr>
+          <a:xfrm>
+            <a:off x="1600200" y="822960"/>
+            <a:ext cx="3657600" cy="3657600"/>
+          </a:xfrm>
+          <a:prstGeom prst="ellipse">
+            <a:avLst/>
+          </a:prstGeom>
+          <a:solidFill>
+            <a:srgbClr val="FFFFFF"/>
+          </a:solidFill>
+          <a:ln>
+            <a:noFill/>
+          </a:ln>
+        </p:spPr>
+        <p:txBody>
+          <a:bodyPr rtlCol="0" anchor="ctr"/>
+          <a:lstStyle/>
+          <a:p>
+            <a:pPr algn="ctr"/>
+          </a:p>
+        </p:txBody>
+      </p:sp>
+      <p:sp>
+        <p:nvSpPr>
+          <p:cNvPr id="4" name="장식"/>
+          <p:cNvSpPr/>
+          <p:nvPr/>
+        </p:nvSpPr>
+        <p:spPr>
+          <a:xfrm>
+            <a:off x="3246120" y="502920"/>
+            <a:ext cx="822960" cy="822960"/>
+          </a:xfrm>
+          <a:prstGeom prst="ellipse">
+            <a:avLst/>
+          </a:prstGeom>
+          <a:solidFill>
+            <a:srgbClr val="EBD4AD"/>
+          </a:solidFill>
+          <a:ln>
+            <a:noFill/>
+          </a:ln>
+        </p:spPr>
+        <p:txBody>
+          <a:bodyPr rtlCol="0" anchor="ctr"/>
+          <a:lstStyle/>
+          <a:p>
+            <a:pPr algn="ctr"/>
+          </a:p>
+        </p:txBody>
+      </p:sp>
+      <p:sp>
+        <p:nvSpPr>
+          <p:cNvPr id="5" name="라벨"/>
+          <p:cNvSpPr txBox="1"/>
+          <p:nvPr/>
+        </p:nvSpPr>
+        <p:spPr>
+          <a:xfrm>
+            <a:off x="731520" y="4572000"/>
+            <a:ext cx="5394960" cy="274320"/>
           </a:xfrm>
           <a:prstGeom prst="rect">
             <a:avLst/>
           </a:prstGeom>
-        </p:spPr>
-      </p:pic>
+          <a:noFill/>
+        </p:spPr>
+        <p:txBody>
+          <a:bodyPr wrap="square" lIns="54864" rIns="54864" tIns="27432" bIns="27432" anchor="t">
+            <a:noAutofit/>
+          </a:bodyPr>
+          <a:lstStyle/>
+          <a:p>
+            <a:pPr algn="ctr">
+              <a:lnSpc>
+                <a:spcPct val="115000"/>
+              </a:lnSpc>
+            </a:pPr>
+            <a:r>
+              <a:rPr sz="1000" b="1" i="0" spc="250">
+                <a:solidFill>
+                  <a:srgbClr val="26231F"/>
+                </a:solidFill>
+              </a:rPr>
+              <a:t>CARD NEWS</a:t>
+            </a:r>
+          </a:p>
+        </p:txBody>
+      </p:sp>
       <p:sp>
         <p:nvSpPr>
           <p:cNvPr id="2" name="Title 1"/>
@@ -3330,8 +3410,8 @@
         </p:nvSpPr>
         <p:spPr>
           <a:xfrm>
-            <a:off x="685800" y="960120"/>
-            <a:ext cx="5486400" cy="1463040"/>
+            <a:off x="731520" y="4892040"/>
+            <a:ext cx="5394960" cy="914400"/>
           </a:xfrm>
         </p:spPr>
         <p:txBody>
@@ -3340,7 +3420,7 @@
           </a:bodyPr>
           <a:lstStyle/>
           <a:p>
-            <a:pPr algn="l">
+            <a:pPr algn="ctr">
               <a:lnSpc>
                 <a:spcPct val="105000"/>
               </a:lnSpc>
@@ -3348,7 +3428,7 @@
             <a:r>
               <a:rPr sz="3000" b="1" i="0">
                 <a:solidFill>
-                  <a:srgbClr val="6E481C"/>
+                  <a:srgbClr val="26231F"/>
                 </a:solidFill>
               </a:rPr>
               <a:t>쉬는 것도 일정에 넣으세요</a:t>
@@ -3358,14 +3438,14 @@
       </p:sp>
       <p:sp>
         <p:nvSpPr>
-          <p:cNvPr id="4" name="한 줄 문구"/>
+          <p:cNvPr id="6" name="한 줄 문구"/>
           <p:cNvSpPr txBox="1"/>
           <p:nvPr/>
         </p:nvSpPr>
         <p:spPr>
           <a:xfrm>
-            <a:off x="685800" y="2560320"/>
-            <a:ext cx="5486400" cy="822960"/>
+            <a:off x="731520" y="5806440"/>
+            <a:ext cx="5394960" cy="822960"/>
           </a:xfrm>
           <a:prstGeom prst="rect">
             <a:avLst/>
@@ -3378,15 +3458,15 @@
           </a:bodyPr>
           <a:lstStyle/>
           <a:p>
-            <a:pPr algn="l">
+            <a:pPr algn="ctr">
               <a:lnSpc>
                 <a:spcPct val="115000"/>
               </a:lnSpc>
             </a:pPr>
             <a:r>
-              <a:rPr sz="1500" b="0" i="1">
+              <a:rPr sz="1500" b="0" i="0">
                 <a:solidFill>
-                  <a:srgbClr val="6E481C"/>
+                  <a:srgbClr val="26231F"/>
                 </a:solidFill>
               </a:rPr>
               <a:t>옆으로 넘겨 보세요 →</a:t>
@@ -3396,14 +3476,14 @@
       </p:sp>
       <p:sp>
         <p:nvSpPr>
-          <p:cNvPr id="5" name="안내 문구"/>
+          <p:cNvPr id="7" name="안내 문구"/>
           <p:cNvSpPr txBox="1"/>
           <p:nvPr/>
         </p:nvSpPr>
         <p:spPr>
           <a:xfrm>
-            <a:off x="685800" y="3429000"/>
-            <a:ext cx="5486400" cy="914400"/>
+            <a:off x="731520" y="6675120"/>
+            <a:ext cx="5394960" cy="914400"/>
           </a:xfrm>
           <a:prstGeom prst="rect">
             <a:avLst/>
@@ -3416,7 +3496,7 @@
           </a:bodyPr>
           <a:lstStyle/>
           <a:p>
-            <a:pPr algn="l">
+            <a:pPr algn="ctr">
               <a:lnSpc>
                 <a:spcPct val="115000"/>
               </a:lnSpc>
@@ -3424,7 +3504,7 @@
             <a:r>
               <a:rPr sz="1200" b="0" i="0">
                 <a:solidFill>
-                  <a:srgbClr val="666666"/>
+                  <a:srgbClr val="26231F"/>
                 </a:solidFill>
               </a:rPr>
               <a:t>오늘의 한마디 · 카드뉴스</a:t>
@@ -3446,7 +3526,7 @@
     <p:bg>
       <p:bgPr>
         <a:solidFill>
-          <a:srgbClr val="FEFAF6"/>
+          <a:srgbClr val="FFFFFF"/>
         </a:solidFill>
         <a:effectLst/>
       </p:bgPr>
@@ -3466,14 +3546,14 @@
         </p:nvSpPr>
         <p:spPr>
           <a:xfrm>
-            <a:off x="0" y="0"/>
-            <a:ext cx="6858000" cy="274320"/>
+            <a:off x="0" y="6565392"/>
+            <a:ext cx="6858000" cy="292608"/>
           </a:xfrm>
           <a:prstGeom prst="rect">
             <a:avLst/>
           </a:prstGeom>
           <a:solidFill>
-            <a:srgbClr val="EC9A3C"/>
+            <a:srgbClr val="EBD4AD"/>
           </a:solidFill>
           <a:ln>
             <a:noFill/>
@@ -3495,14 +3575,14 @@
         </p:nvSpPr>
         <p:spPr>
           <a:xfrm>
-            <a:off x="0" y="274320"/>
-            <a:ext cx="6858000" cy="54864"/>
+            <a:off x="640080" y="566928"/>
+            <a:ext cx="5577840" cy="10972"/>
           </a:xfrm>
           <a:prstGeom prst="rect">
             <a:avLst/>
           </a:prstGeom>
           <a:solidFill>
-            <a:srgbClr val="1990E6"/>
+            <a:srgbClr val="26231F"/>
           </a:solidFill>
           <a:ln>
             <a:noFill/>
@@ -3518,6 +3598,73 @@
       </p:sp>
       <p:sp>
         <p:nvSpPr>
+          <p:cNvPr id="5" name="상단 라벨"/>
+          <p:cNvSpPr txBox="1"/>
+          <p:nvPr/>
+        </p:nvSpPr>
+        <p:spPr>
+          <a:xfrm>
+            <a:off x="640080" y="237744"/>
+            <a:ext cx="5486400" cy="274320"/>
+          </a:xfrm>
+          <a:prstGeom prst="rect">
+            <a:avLst/>
+          </a:prstGeom>
+          <a:noFill/>
+        </p:spPr>
+        <p:txBody>
+          <a:bodyPr wrap="square" lIns="54864" rIns="54864" tIns="27432" bIns="27432" anchor="ctr">
+            <a:noAutofit/>
+          </a:bodyPr>
+          <a:lstStyle/>
+          <a:p>
+            <a:pPr algn="l">
+              <a:lnSpc>
+                <a:spcPct val="115000"/>
+              </a:lnSpc>
+            </a:pPr>
+            <a:r>
+              <a:rPr sz="900" b="1" i="0" spc="250">
+                <a:solidFill>
+                  <a:srgbClr val="26231F"/>
+                </a:solidFill>
+              </a:rPr>
+              <a:t>CARD NEWS</a:t>
+            </a:r>
+          </a:p>
+        </p:txBody>
+      </p:sp>
+      <p:sp>
+        <p:nvSpPr>
+          <p:cNvPr id="6" name="포인트"/>
+          <p:cNvSpPr/>
+          <p:nvPr/>
+        </p:nvSpPr>
+        <p:spPr>
+          <a:xfrm>
+            <a:off x="5870448" y="246888"/>
+            <a:ext cx="237744" cy="237744"/>
+          </a:xfrm>
+          <a:prstGeom prst="heart">
+            <a:avLst/>
+          </a:prstGeom>
+          <a:solidFill>
+            <a:srgbClr val="E1C698"/>
+          </a:solidFill>
+          <a:ln>
+            <a:noFill/>
+          </a:ln>
+        </p:spPr>
+        <p:txBody>
+          <a:bodyPr rtlCol="0" anchor="ctr"/>
+          <a:lstStyle/>
+          <a:p>
+            <a:pPr algn="ctr"/>
+          </a:p>
+        </p:txBody>
+      </p:sp>
+      <p:sp>
+        <p:nvSpPr>
           <p:cNvPr id="2" name="Title 1"/>
           <p:cNvSpPr>
             <a:spLocks noGrp="1"/>
@@ -3528,8 +3675,8 @@
         </p:nvSpPr>
         <p:spPr>
           <a:xfrm>
-            <a:off x="640080" y="457200"/>
-            <a:ext cx="4389120" cy="868680"/>
+            <a:off x="640080" y="731520"/>
+            <a:ext cx="5577840" cy="822960"/>
           </a:xfrm>
         </p:spPr>
         <p:txBody>
@@ -3546,7 +3693,7 @@
             <a:r>
               <a:rPr sz="2600" b="1" i="0">
                 <a:solidFill>
-                  <a:srgbClr val="6E481C"/>
+                  <a:srgbClr val="26231F"/>
                 </a:solidFill>
               </a:rPr>
               <a:t>점심은 거르지 마세요</a:t>
@@ -3556,13 +3703,13 @@
       </p:sp>
       <p:sp>
         <p:nvSpPr>
-          <p:cNvPr id="5" name="번호"/>
+          <p:cNvPr id="7" name="번호"/>
           <p:cNvSpPr txBox="1"/>
           <p:nvPr/>
         </p:nvSpPr>
         <p:spPr>
           <a:xfrm>
-            <a:off x="640080" y="1691640"/>
+            <a:off x="640080" y="1874519"/>
             <a:ext cx="2194560" cy="1280160"/>
           </a:xfrm>
           <a:prstGeom prst="rect">
@@ -3584,7 +3731,7 @@
             <a:r>
               <a:rPr sz="6600" b="1" i="0">
                 <a:solidFill>
-                  <a:srgbClr val="EC9A3C"/>
+                  <a:srgbClr val="E1C698"/>
                 </a:solidFill>
               </a:rPr>
               <a:t>01</a:t>
@@ -3594,13 +3741,13 @@
       </p:sp>
       <p:sp>
         <p:nvSpPr>
-          <p:cNvPr id="6" name="본문"/>
+          <p:cNvPr id="8" name="본문"/>
           <p:cNvSpPr txBox="1"/>
           <p:nvPr/>
         </p:nvSpPr>
         <p:spPr>
           <a:xfrm>
-            <a:off x="640080" y="3154680"/>
+            <a:off x="640080" y="3337560"/>
             <a:ext cx="5577840" cy="2651760"/>
           </a:xfrm>
           <a:prstGeom prst="rect">
@@ -3622,7 +3769,7 @@
             <a:r>
               <a:rPr sz="2800" b="0" i="0">
                 <a:solidFill>
-                  <a:srgbClr val="2B2B2B"/>
+                  <a:srgbClr val="26231F"/>
                 </a:solidFill>
               </a:rPr>
               <a:t>바빠도 한 끼는 앉아서 먹어요. 오후가 달라져요.</a:t>
@@ -3632,13 +3779,13 @@
       </p:sp>
       <p:sp>
         <p:nvSpPr>
-          <p:cNvPr id="7" name="쪽 번호"/>
+          <p:cNvPr id="9" name="쪽 번호"/>
           <p:cNvSpPr txBox="1"/>
           <p:nvPr/>
         </p:nvSpPr>
         <p:spPr>
           <a:xfrm>
-            <a:off x="640080" y="6035040"/>
+            <a:off x="640080" y="5806440"/>
             <a:ext cx="5577840" cy="365760"/>
           </a:xfrm>
           <a:prstGeom prst="rect">
@@ -3682,7 +3829,7 @@
     <p:bg>
       <p:bgPr>
         <a:solidFill>
-          <a:srgbClr val="FEFAF6"/>
+          <a:srgbClr val="FFFFFF"/>
         </a:solidFill>
         <a:effectLst/>
       </p:bgPr>
@@ -3702,14 +3849,14 @@
         </p:nvSpPr>
         <p:spPr>
           <a:xfrm>
-            <a:off x="0" y="0"/>
-            <a:ext cx="6858000" cy="274320"/>
+            <a:off x="0" y="6565392"/>
+            <a:ext cx="6858000" cy="292608"/>
           </a:xfrm>
           <a:prstGeom prst="rect">
             <a:avLst/>
           </a:prstGeom>
           <a:solidFill>
-            <a:srgbClr val="EC9A3C"/>
+            <a:srgbClr val="EBD4AD"/>
           </a:solidFill>
           <a:ln>
             <a:noFill/>
@@ -3731,14 +3878,14 @@
         </p:nvSpPr>
         <p:spPr>
           <a:xfrm>
-            <a:off x="0" y="274320"/>
-            <a:ext cx="6858000" cy="54864"/>
+            <a:off x="640080" y="566928"/>
+            <a:ext cx="5577840" cy="10972"/>
           </a:xfrm>
           <a:prstGeom prst="rect">
             <a:avLst/>
           </a:prstGeom>
           <a:solidFill>
-            <a:srgbClr val="1990E6"/>
+            <a:srgbClr val="26231F"/>
           </a:solidFill>
           <a:ln>
             <a:noFill/>
@@ -3754,6 +3901,73 @@
       </p:sp>
       <p:sp>
         <p:nvSpPr>
+          <p:cNvPr id="5" name="상단 라벨"/>
+          <p:cNvSpPr txBox="1"/>
+          <p:nvPr/>
+        </p:nvSpPr>
+        <p:spPr>
+          <a:xfrm>
+            <a:off x="640080" y="237744"/>
+            <a:ext cx="5486400" cy="274320"/>
+          </a:xfrm>
+          <a:prstGeom prst="rect">
+            <a:avLst/>
+          </a:prstGeom>
+          <a:noFill/>
+        </p:spPr>
+        <p:txBody>
+          <a:bodyPr wrap="square" lIns="54864" rIns="54864" tIns="27432" bIns="27432" anchor="ctr">
+            <a:noAutofit/>
+          </a:bodyPr>
+          <a:lstStyle/>
+          <a:p>
+            <a:pPr algn="l">
+              <a:lnSpc>
+                <a:spcPct val="115000"/>
+              </a:lnSpc>
+            </a:pPr>
+            <a:r>
+              <a:rPr sz="900" b="1" i="0" spc="250">
+                <a:solidFill>
+                  <a:srgbClr val="26231F"/>
+                </a:solidFill>
+              </a:rPr>
+              <a:t>CARD NEWS</a:t>
+            </a:r>
+          </a:p>
+        </p:txBody>
+      </p:sp>
+      <p:sp>
+        <p:nvSpPr>
+          <p:cNvPr id="6" name="포인트"/>
+          <p:cNvSpPr/>
+          <p:nvPr/>
+        </p:nvSpPr>
+        <p:spPr>
+          <a:xfrm>
+            <a:off x="5870448" y="246888"/>
+            <a:ext cx="237744" cy="237744"/>
+          </a:xfrm>
+          <a:prstGeom prst="heart">
+            <a:avLst/>
+          </a:prstGeom>
+          <a:solidFill>
+            <a:srgbClr val="E1C698"/>
+          </a:solidFill>
+          <a:ln>
+            <a:noFill/>
+          </a:ln>
+        </p:spPr>
+        <p:txBody>
+          <a:bodyPr rtlCol="0" anchor="ctr"/>
+          <a:lstStyle/>
+          <a:p>
+            <a:pPr algn="ctr"/>
+          </a:p>
+        </p:txBody>
+      </p:sp>
+      <p:sp>
+        <p:nvSpPr>
           <p:cNvPr id="2" name="Title 1"/>
           <p:cNvSpPr>
             <a:spLocks noGrp="1"/>
@@ -3764,8 +3978,8 @@
         </p:nvSpPr>
         <p:spPr>
           <a:xfrm>
-            <a:off x="640080" y="457200"/>
-            <a:ext cx="4389120" cy="868680"/>
+            <a:off x="640080" y="731520"/>
+            <a:ext cx="5577840" cy="822960"/>
           </a:xfrm>
         </p:spPr>
         <p:txBody>
@@ -3782,7 +3996,7 @@
             <a:r>
               <a:rPr sz="2600" b="1" i="0">
                 <a:solidFill>
-                  <a:srgbClr val="6E481C"/>
+                  <a:srgbClr val="26231F"/>
                 </a:solidFill>
               </a:rPr>
               <a:t>전화 한 통 걸어 보세요</a:t>
@@ -3792,13 +4006,13 @@
       </p:sp>
       <p:sp>
         <p:nvSpPr>
-          <p:cNvPr id="5" name="번호"/>
+          <p:cNvPr id="7" name="번호"/>
           <p:cNvSpPr txBox="1"/>
           <p:nvPr/>
         </p:nvSpPr>
         <p:spPr>
           <a:xfrm>
-            <a:off x="640080" y="1691640"/>
+            <a:off x="640080" y="1874519"/>
             <a:ext cx="2194560" cy="1280160"/>
           </a:xfrm>
           <a:prstGeom prst="rect">
@@ -3820,7 +4034,7 @@
             <a:r>
               <a:rPr sz="6600" b="1" i="0">
                 <a:solidFill>
-                  <a:srgbClr val="EC9A3C"/>
+                  <a:srgbClr val="E1C698"/>
                 </a:solidFill>
               </a:rPr>
               <a:t>02</a:t>
@@ -3830,13 +4044,13 @@
       </p:sp>
       <p:sp>
         <p:nvSpPr>
-          <p:cNvPr id="6" name="본문"/>
+          <p:cNvPr id="8" name="본문"/>
           <p:cNvSpPr txBox="1"/>
           <p:nvPr/>
         </p:nvSpPr>
         <p:spPr>
           <a:xfrm>
-            <a:off x="640080" y="3154680"/>
+            <a:off x="640080" y="3337560"/>
             <a:ext cx="5577840" cy="2651760"/>
           </a:xfrm>
           <a:prstGeom prst="rect">
@@ -3858,7 +4072,7 @@
             <a:r>
               <a:rPr sz="2800" b="0" i="0">
                 <a:solidFill>
-                  <a:srgbClr val="2B2B2B"/>
+                  <a:srgbClr val="26231F"/>
                 </a:solidFill>
               </a:rPr>
               <a:t>문자보다 목소리가 먼저 떠오르는 사람이 있다면 지금 걸어 보세요.</a:t>
@@ -3868,13 +4082,13 @@
       </p:sp>
       <p:sp>
         <p:nvSpPr>
-          <p:cNvPr id="7" name="쪽 번호"/>
+          <p:cNvPr id="9" name="쪽 번호"/>
           <p:cNvSpPr txBox="1"/>
           <p:nvPr/>
         </p:nvSpPr>
         <p:spPr>
           <a:xfrm>
-            <a:off x="640080" y="6035040"/>
+            <a:off x="640080" y="5806440"/>
             <a:ext cx="5577840" cy="365760"/>
           </a:xfrm>
           <a:prstGeom prst="rect">
@@ -3918,7 +4132,7 @@
     <p:bg>
       <p:bgPr>
         <a:solidFill>
-          <a:srgbClr val="FEFAF6"/>
+          <a:srgbClr val="FFFFFF"/>
         </a:solidFill>
         <a:effectLst/>
       </p:bgPr>
@@ -3938,14 +4152,14 @@
         </p:nvSpPr>
         <p:spPr>
           <a:xfrm>
-            <a:off x="0" y="0"/>
-            <a:ext cx="6858000" cy="274320"/>
+            <a:off x="0" y="6565392"/>
+            <a:ext cx="6858000" cy="292608"/>
           </a:xfrm>
           <a:prstGeom prst="rect">
             <a:avLst/>
           </a:prstGeom>
           <a:solidFill>
-            <a:srgbClr val="EC9A3C"/>
+            <a:srgbClr val="EBD4AD"/>
           </a:solidFill>
           <a:ln>
             <a:noFill/>
@@ -3967,14 +4181,14 @@
         </p:nvSpPr>
         <p:spPr>
           <a:xfrm>
-            <a:off x="0" y="274320"/>
-            <a:ext cx="6858000" cy="54864"/>
+            <a:off x="640080" y="566928"/>
+            <a:ext cx="5577840" cy="10972"/>
           </a:xfrm>
           <a:prstGeom prst="rect">
             <a:avLst/>
           </a:prstGeom>
           <a:solidFill>
-            <a:srgbClr val="1990E6"/>
+            <a:srgbClr val="26231F"/>
           </a:solidFill>
           <a:ln>
             <a:noFill/>
@@ -3990,6 +4204,73 @@
       </p:sp>
       <p:sp>
         <p:nvSpPr>
+          <p:cNvPr id="5" name="상단 라벨"/>
+          <p:cNvSpPr txBox="1"/>
+          <p:nvPr/>
+        </p:nvSpPr>
+        <p:spPr>
+          <a:xfrm>
+            <a:off x="640080" y="237744"/>
+            <a:ext cx="5486400" cy="274320"/>
+          </a:xfrm>
+          <a:prstGeom prst="rect">
+            <a:avLst/>
+          </a:prstGeom>
+          <a:noFill/>
+        </p:spPr>
+        <p:txBody>
+          <a:bodyPr wrap="square" lIns="54864" rIns="54864" tIns="27432" bIns="27432" anchor="ctr">
+            <a:noAutofit/>
+          </a:bodyPr>
+          <a:lstStyle/>
+          <a:p>
+            <a:pPr algn="l">
+              <a:lnSpc>
+                <a:spcPct val="115000"/>
+              </a:lnSpc>
+            </a:pPr>
+            <a:r>
+              <a:rPr sz="900" b="1" i="0" spc="250">
+                <a:solidFill>
+                  <a:srgbClr val="26231F"/>
+                </a:solidFill>
+              </a:rPr>
+              <a:t>CARD NEWS</a:t>
+            </a:r>
+          </a:p>
+        </p:txBody>
+      </p:sp>
+      <p:sp>
+        <p:nvSpPr>
+          <p:cNvPr id="6" name="포인트"/>
+          <p:cNvSpPr/>
+          <p:nvPr/>
+        </p:nvSpPr>
+        <p:spPr>
+          <a:xfrm>
+            <a:off x="5870448" y="246888"/>
+            <a:ext cx="237744" cy="237744"/>
+          </a:xfrm>
+          <a:prstGeom prst="heart">
+            <a:avLst/>
+          </a:prstGeom>
+          <a:solidFill>
+            <a:srgbClr val="E1C698"/>
+          </a:solidFill>
+          <a:ln>
+            <a:noFill/>
+          </a:ln>
+        </p:spPr>
+        <p:txBody>
+          <a:bodyPr rtlCol="0" anchor="ctr"/>
+          <a:lstStyle/>
+          <a:p>
+            <a:pPr algn="ctr"/>
+          </a:p>
+        </p:txBody>
+      </p:sp>
+      <p:sp>
+        <p:nvSpPr>
           <p:cNvPr id="2" name="Title 1"/>
           <p:cNvSpPr>
             <a:spLocks noGrp="1"/>
@@ -4000,8 +4281,8 @@
         </p:nvSpPr>
         <p:spPr>
           <a:xfrm>
-            <a:off x="640080" y="457200"/>
-            <a:ext cx="4389120" cy="868680"/>
+            <a:off x="640080" y="731520"/>
+            <a:ext cx="5577840" cy="822960"/>
           </a:xfrm>
         </p:spPr>
         <p:txBody>
@@ -4018,7 +4299,7 @@
             <a:r>
               <a:rPr sz="2600" b="1" i="0">
                 <a:solidFill>
-                  <a:srgbClr val="6E481C"/>
+                  <a:srgbClr val="26231F"/>
                 </a:solidFill>
               </a:rPr>
               <a:t>메모 한 장 남기기</a:t>
@@ -4028,13 +4309,13 @@
       </p:sp>
       <p:sp>
         <p:nvSpPr>
-          <p:cNvPr id="5" name="번호"/>
+          <p:cNvPr id="7" name="번호"/>
           <p:cNvSpPr txBox="1"/>
           <p:nvPr/>
         </p:nvSpPr>
         <p:spPr>
           <a:xfrm>
-            <a:off x="640080" y="1691640"/>
+            <a:off x="640080" y="1874519"/>
             <a:ext cx="2194560" cy="1280160"/>
           </a:xfrm>
           <a:prstGeom prst="rect">
@@ -4056,7 +4337,7 @@
             <a:r>
               <a:rPr sz="6600" b="1" i="0">
                 <a:solidFill>
-                  <a:srgbClr val="EC9A3C"/>
+                  <a:srgbClr val="E1C698"/>
                 </a:solidFill>
               </a:rPr>
               <a:t>03</a:t>
@@ -4066,13 +4347,13 @@
       </p:sp>
       <p:sp>
         <p:nvSpPr>
-          <p:cNvPr id="6" name="본문"/>
+          <p:cNvPr id="8" name="본문"/>
           <p:cNvSpPr txBox="1"/>
           <p:nvPr/>
         </p:nvSpPr>
         <p:spPr>
           <a:xfrm>
-            <a:off x="640080" y="3154680"/>
+            <a:off x="640080" y="3337560"/>
             <a:ext cx="5577840" cy="2651760"/>
           </a:xfrm>
           <a:prstGeom prst="rect">
@@ -4094,7 +4375,7 @@
             <a:r>
               <a:rPr sz="2800" b="0" i="0">
                 <a:solidFill>
-                  <a:srgbClr val="2B2B2B"/>
+                  <a:srgbClr val="26231F"/>
                 </a:solidFill>
               </a:rPr>
               <a:t>생각났을 때 적어 두면 다음 주의 내가 고마워해요.</a:t>
@@ -4104,13 +4385,13 @@
       </p:sp>
       <p:sp>
         <p:nvSpPr>
-          <p:cNvPr id="7" name="쪽 번호"/>
+          <p:cNvPr id="9" name="쪽 번호"/>
           <p:cNvSpPr txBox="1"/>
           <p:nvPr/>
         </p:nvSpPr>
         <p:spPr>
           <a:xfrm>
-            <a:off x="640080" y="6035040"/>
+            <a:off x="640080" y="5806440"/>
             <a:ext cx="5577840" cy="365760"/>
           </a:xfrm>
           <a:prstGeom prst="rect">
@@ -4154,7 +4435,7 @@
     <p:bg>
       <p:bgPr>
         <a:solidFill>
-          <a:srgbClr val="FEFAF6"/>
+          <a:srgbClr val="FFFFFF"/>
         </a:solidFill>
         <a:effectLst/>
       </p:bgPr>
@@ -4174,14 +4455,14 @@
         </p:nvSpPr>
         <p:spPr>
           <a:xfrm>
-            <a:off x="0" y="0"/>
-            <a:ext cx="6858000" cy="274320"/>
+            <a:off x="0" y="6565392"/>
+            <a:ext cx="6858000" cy="292608"/>
           </a:xfrm>
           <a:prstGeom prst="rect">
             <a:avLst/>
           </a:prstGeom>
           <a:solidFill>
-            <a:srgbClr val="EC9A3C"/>
+            <a:srgbClr val="EBD4AD"/>
           </a:solidFill>
           <a:ln>
             <a:noFill/>
@@ -4203,14 +4484,14 @@
         </p:nvSpPr>
         <p:spPr>
           <a:xfrm>
-            <a:off x="0" y="274320"/>
-            <a:ext cx="6858000" cy="54864"/>
+            <a:off x="640080" y="566928"/>
+            <a:ext cx="5577840" cy="10972"/>
           </a:xfrm>
           <a:prstGeom prst="rect">
             <a:avLst/>
           </a:prstGeom>
           <a:solidFill>
-            <a:srgbClr val="1990E6"/>
+            <a:srgbClr val="26231F"/>
           </a:solidFill>
           <a:ln>
             <a:noFill/>
@@ -4226,6 +4507,73 @@
       </p:sp>
       <p:sp>
         <p:nvSpPr>
+          <p:cNvPr id="5" name="상단 라벨"/>
+          <p:cNvSpPr txBox="1"/>
+          <p:nvPr/>
+        </p:nvSpPr>
+        <p:spPr>
+          <a:xfrm>
+            <a:off x="640080" y="237744"/>
+            <a:ext cx="5486400" cy="274320"/>
+          </a:xfrm>
+          <a:prstGeom prst="rect">
+            <a:avLst/>
+          </a:prstGeom>
+          <a:noFill/>
+        </p:spPr>
+        <p:txBody>
+          <a:bodyPr wrap="square" lIns="54864" rIns="54864" tIns="27432" bIns="27432" anchor="ctr">
+            <a:noAutofit/>
+          </a:bodyPr>
+          <a:lstStyle/>
+          <a:p>
+            <a:pPr algn="l">
+              <a:lnSpc>
+                <a:spcPct val="115000"/>
+              </a:lnSpc>
+            </a:pPr>
+            <a:r>
+              <a:rPr sz="900" b="1" i="0" spc="250">
+                <a:solidFill>
+                  <a:srgbClr val="26231F"/>
+                </a:solidFill>
+              </a:rPr>
+              <a:t>CARD NEWS</a:t>
+            </a:r>
+          </a:p>
+        </p:txBody>
+      </p:sp>
+      <p:sp>
+        <p:nvSpPr>
+          <p:cNvPr id="6" name="포인트"/>
+          <p:cNvSpPr/>
+          <p:nvPr/>
+        </p:nvSpPr>
+        <p:spPr>
+          <a:xfrm>
+            <a:off x="5870448" y="246888"/>
+            <a:ext cx="237744" cy="237744"/>
+          </a:xfrm>
+          <a:prstGeom prst="heart">
+            <a:avLst/>
+          </a:prstGeom>
+          <a:solidFill>
+            <a:srgbClr val="E1C698"/>
+          </a:solidFill>
+          <a:ln>
+            <a:noFill/>
+          </a:ln>
+        </p:spPr>
+        <p:txBody>
+          <a:bodyPr rtlCol="0" anchor="ctr"/>
+          <a:lstStyle/>
+          <a:p>
+            <a:pPr algn="ctr"/>
+          </a:p>
+        </p:txBody>
+      </p:sp>
+      <p:sp>
+        <p:nvSpPr>
           <p:cNvPr id="2" name="Title 1"/>
           <p:cNvSpPr>
             <a:spLocks noGrp="1"/>
@@ -4236,8 +4584,8 @@
         </p:nvSpPr>
         <p:spPr>
           <a:xfrm>
-            <a:off x="640080" y="457200"/>
-            <a:ext cx="4389120" cy="868680"/>
+            <a:off x="640080" y="731520"/>
+            <a:ext cx="5577840" cy="822960"/>
           </a:xfrm>
         </p:spPr>
         <p:txBody>
@@ -4254,7 +4602,7 @@
             <a:r>
               <a:rPr sz="2600" b="1" i="0">
                 <a:solidFill>
-                  <a:srgbClr val="6E481C"/>
+                  <a:srgbClr val="26231F"/>
                 </a:solidFill>
               </a:rPr>
               <a:t>퇴근길 한 정거장 걷기</a:t>
@@ -4264,13 +4612,13 @@
       </p:sp>
       <p:sp>
         <p:nvSpPr>
-          <p:cNvPr id="5" name="번호"/>
+          <p:cNvPr id="7" name="번호"/>
           <p:cNvSpPr txBox="1"/>
           <p:nvPr/>
         </p:nvSpPr>
         <p:spPr>
           <a:xfrm>
-            <a:off x="640080" y="1691640"/>
+            <a:off x="640080" y="1874519"/>
             <a:ext cx="2194560" cy="1280160"/>
           </a:xfrm>
           <a:prstGeom prst="rect">
@@ -4292,7 +4640,7 @@
             <a:r>
               <a:rPr sz="6600" b="1" i="0">
                 <a:solidFill>
-                  <a:srgbClr val="EC9A3C"/>
+                  <a:srgbClr val="E1C698"/>
                 </a:solidFill>
               </a:rPr>
               <a:t>04</a:t>
@@ -4302,13 +4650,13 @@
       </p:sp>
       <p:sp>
         <p:nvSpPr>
-          <p:cNvPr id="6" name="본문"/>
+          <p:cNvPr id="8" name="본문"/>
           <p:cNvSpPr txBox="1"/>
           <p:nvPr/>
         </p:nvSpPr>
         <p:spPr>
           <a:xfrm>
-            <a:off x="640080" y="3154680"/>
+            <a:off x="640080" y="3337560"/>
             <a:ext cx="5577840" cy="2651760"/>
           </a:xfrm>
           <a:prstGeom prst="rect">
@@ -4330,7 +4678,7 @@
             <a:r>
               <a:rPr sz="2800" b="0" i="0">
                 <a:solidFill>
-                  <a:srgbClr val="2B2B2B"/>
+                  <a:srgbClr val="26231F"/>
                 </a:solidFill>
               </a:rPr>
               <a:t>한 정거장 먼저 내려 걸으면 머리가 정리돼요.</a:t>
@@ -4340,13 +4688,13 @@
       </p:sp>
       <p:sp>
         <p:nvSpPr>
-          <p:cNvPr id="7" name="쪽 번호"/>
+          <p:cNvPr id="9" name="쪽 번호"/>
           <p:cNvSpPr txBox="1"/>
           <p:nvPr/>
         </p:nvSpPr>
         <p:spPr>
           <a:xfrm>
-            <a:off x="640080" y="6035040"/>
+            <a:off x="640080" y="5806440"/>
             <a:ext cx="5577840" cy="365760"/>
           </a:xfrm>
           <a:prstGeom prst="rect">
@@ -4390,7 +4738,7 @@
     <p:bg>
       <p:bgPr>
         <a:solidFill>
-          <a:srgbClr val="FEFAF6"/>
+          <a:srgbClr val="FFFFFF"/>
         </a:solidFill>
         <a:effectLst/>
       </p:bgPr>
@@ -4410,14 +4758,14 @@
         </p:nvSpPr>
         <p:spPr>
           <a:xfrm>
-            <a:off x="0" y="0"/>
-            <a:ext cx="6858000" cy="274320"/>
+            <a:off x="0" y="6565392"/>
+            <a:ext cx="6858000" cy="292608"/>
           </a:xfrm>
           <a:prstGeom prst="rect">
             <a:avLst/>
           </a:prstGeom>
           <a:solidFill>
-            <a:srgbClr val="EC9A3C"/>
+            <a:srgbClr val="EBD4AD"/>
           </a:solidFill>
           <a:ln>
             <a:noFill/>
@@ -4439,14 +4787,14 @@
         </p:nvSpPr>
         <p:spPr>
           <a:xfrm>
-            <a:off x="0" y="274320"/>
-            <a:ext cx="6858000" cy="54864"/>
+            <a:off x="640080" y="566928"/>
+            <a:ext cx="5577840" cy="10972"/>
           </a:xfrm>
           <a:prstGeom prst="rect">
             <a:avLst/>
           </a:prstGeom>
           <a:solidFill>
-            <a:srgbClr val="1990E6"/>
+            <a:srgbClr val="26231F"/>
           </a:solidFill>
           <a:ln>
             <a:noFill/>
@@ -4462,6 +4810,73 @@
       </p:sp>
       <p:sp>
         <p:nvSpPr>
+          <p:cNvPr id="5" name="상단 라벨"/>
+          <p:cNvSpPr txBox="1"/>
+          <p:nvPr/>
+        </p:nvSpPr>
+        <p:spPr>
+          <a:xfrm>
+            <a:off x="640080" y="237744"/>
+            <a:ext cx="5486400" cy="274320"/>
+          </a:xfrm>
+          <a:prstGeom prst="rect">
+            <a:avLst/>
+          </a:prstGeom>
+          <a:noFill/>
+        </p:spPr>
+        <p:txBody>
+          <a:bodyPr wrap="square" lIns="54864" rIns="54864" tIns="27432" bIns="27432" anchor="ctr">
+            <a:noAutofit/>
+          </a:bodyPr>
+          <a:lstStyle/>
+          <a:p>
+            <a:pPr algn="l">
+              <a:lnSpc>
+                <a:spcPct val="115000"/>
+              </a:lnSpc>
+            </a:pPr>
+            <a:r>
+              <a:rPr sz="900" b="1" i="0" spc="250">
+                <a:solidFill>
+                  <a:srgbClr val="26231F"/>
+                </a:solidFill>
+              </a:rPr>
+              <a:t>CARD NEWS</a:t>
+            </a:r>
+          </a:p>
+        </p:txBody>
+      </p:sp>
+      <p:sp>
+        <p:nvSpPr>
+          <p:cNvPr id="6" name="포인트"/>
+          <p:cNvSpPr/>
+          <p:nvPr/>
+        </p:nvSpPr>
+        <p:spPr>
+          <a:xfrm>
+            <a:off x="5870448" y="246888"/>
+            <a:ext cx="237744" cy="237744"/>
+          </a:xfrm>
+          <a:prstGeom prst="heart">
+            <a:avLst/>
+          </a:prstGeom>
+          <a:solidFill>
+            <a:srgbClr val="E1C698"/>
+          </a:solidFill>
+          <a:ln>
+            <a:noFill/>
+          </a:ln>
+        </p:spPr>
+        <p:txBody>
+          <a:bodyPr rtlCol="0" anchor="ctr"/>
+          <a:lstStyle/>
+          <a:p>
+            <a:pPr algn="ctr"/>
+          </a:p>
+        </p:txBody>
+      </p:sp>
+      <p:sp>
+        <p:nvSpPr>
           <p:cNvPr id="2" name="Title 1"/>
           <p:cNvSpPr>
             <a:spLocks noGrp="1"/>
@@ -4472,8 +4887,8 @@
         </p:nvSpPr>
         <p:spPr>
           <a:xfrm>
-            <a:off x="640080" y="457200"/>
-            <a:ext cx="4389120" cy="868680"/>
+            <a:off x="640080" y="731520"/>
+            <a:ext cx="5577840" cy="822960"/>
           </a:xfrm>
         </p:spPr>
         <p:txBody>
@@ -4490,7 +4905,7 @@
             <a:r>
               <a:rPr sz="2600" b="1" i="0">
                 <a:solidFill>
-                  <a:srgbClr val="6E481C"/>
+                  <a:srgbClr val="26231F"/>
                 </a:solidFill>
               </a:rPr>
               <a:t>오늘은 일찍 자기</a:t>
@@ -4500,13 +4915,13 @@
       </p:sp>
       <p:sp>
         <p:nvSpPr>
-          <p:cNvPr id="5" name="번호"/>
+          <p:cNvPr id="7" name="번호"/>
           <p:cNvSpPr txBox="1"/>
           <p:nvPr/>
         </p:nvSpPr>
         <p:spPr>
           <a:xfrm>
-            <a:off x="640080" y="1691640"/>
+            <a:off x="640080" y="1874519"/>
             <a:ext cx="2194560" cy="1280160"/>
           </a:xfrm>
           <a:prstGeom prst="rect">
@@ -4528,7 +4943,7 @@
             <a:r>
               <a:rPr sz="6600" b="1" i="0">
                 <a:solidFill>
-                  <a:srgbClr val="EC9A3C"/>
+                  <a:srgbClr val="E1C698"/>
                 </a:solidFill>
               </a:rPr>
               <a:t>05</a:t>
@@ -4538,13 +4953,13 @@
       </p:sp>
       <p:sp>
         <p:nvSpPr>
-          <p:cNvPr id="6" name="본문"/>
+          <p:cNvPr id="8" name="본문"/>
           <p:cNvSpPr txBox="1"/>
           <p:nvPr/>
         </p:nvSpPr>
         <p:spPr>
           <a:xfrm>
-            <a:off x="640080" y="3154680"/>
+            <a:off x="640080" y="3337560"/>
             <a:ext cx="5577840" cy="2651760"/>
           </a:xfrm>
           <a:prstGeom prst="rect">
@@ -4566,7 +4981,7 @@
             <a:r>
               <a:rPr sz="2800" b="0" i="0">
                 <a:solidFill>
-                  <a:srgbClr val="2B2B2B"/>
+                  <a:srgbClr val="26231F"/>
                 </a:solidFill>
               </a:rPr>
               <a:t>미룬 일은 내일 해도 돼요. 오늘은 불을 일찍 끄세요.</a:t>
@@ -4576,13 +4991,13 @@
       </p:sp>
       <p:sp>
         <p:nvSpPr>
-          <p:cNvPr id="7" name="쪽 번호"/>
+          <p:cNvPr id="9" name="쪽 번호"/>
           <p:cNvSpPr txBox="1"/>
           <p:nvPr/>
         </p:nvSpPr>
         <p:spPr>
           <a:xfrm>
-            <a:off x="640080" y="6035040"/>
+            <a:off x="640080" y="5806440"/>
             <a:ext cx="5577840" cy="365760"/>
           </a:xfrm>
           <a:prstGeom prst="rect">
@@ -4623,6 +5038,14 @@
 <file path=ppt/slides/slide7.xml><?xml version="1.0" encoding="utf-8"?>
 <p:sld xmlns:a="http://schemas.openxmlformats.org/drawingml/2006/main" xmlns:p="http://schemas.openxmlformats.org/presentationml/2006/main" xmlns:r="http://schemas.openxmlformats.org/officeDocument/2006/relationships">
   <p:cSld>
+    <p:bg>
+      <p:bgPr>
+        <a:solidFill>
+          <a:srgbClr val="F6EAD5"/>
+        </a:solidFill>
+        <a:effectLst/>
+      </p:bgPr>
+    </p:bg>
     <p:spTree>
       <p:nvGrpSpPr>
         <p:cNvPr id="1" name=""/>
@@ -4630,30 +5053,102 @@
         <p:nvPr/>
       </p:nvGrpSpPr>
       <p:grpSpPr/>
-      <p:pic>
-        <p:nvPicPr>
-          <p:cNvPr id="3" name="표지 그림" descr="news-45.jpg"/>
-          <p:cNvPicPr>
-            <a:picLocks noChangeAspect="1"/>
-          </p:cNvPicPr>
+      <p:sp>
+        <p:nvSpPr>
+          <p:cNvPr id="3" name="장식"/>
+          <p:cNvSpPr/>
           <p:nvPr/>
-        </p:nvPicPr>
-        <p:blipFill>
-          <a:blip r:embed="rId2"/>
-          <a:stretch>
-            <a:fillRect/>
-          </a:stretch>
-        </p:blipFill>
-        <p:spPr>
-          <a:xfrm>
-            <a:off x="0" y="0"/>
-            <a:ext cx="6858000" cy="6858000"/>
+        </p:nvSpPr>
+        <p:spPr>
+          <a:xfrm>
+            <a:off x="1600200" y="822960"/>
+            <a:ext cx="3657600" cy="3657600"/>
+          </a:xfrm>
+          <a:prstGeom prst="ellipse">
+            <a:avLst/>
+          </a:prstGeom>
+          <a:solidFill>
+            <a:srgbClr val="FFFFFF"/>
+          </a:solidFill>
+          <a:ln>
+            <a:noFill/>
+          </a:ln>
+        </p:spPr>
+        <p:txBody>
+          <a:bodyPr rtlCol="0" anchor="ctr"/>
+          <a:lstStyle/>
+          <a:p>
+            <a:pPr algn="ctr"/>
+          </a:p>
+        </p:txBody>
+      </p:sp>
+      <p:sp>
+        <p:nvSpPr>
+          <p:cNvPr id="4" name="장식"/>
+          <p:cNvSpPr/>
+          <p:nvPr/>
+        </p:nvSpPr>
+        <p:spPr>
+          <a:xfrm>
+            <a:off x="3246120" y="502920"/>
+            <a:ext cx="822960" cy="822960"/>
+          </a:xfrm>
+          <a:prstGeom prst="ellipse">
+            <a:avLst/>
+          </a:prstGeom>
+          <a:solidFill>
+            <a:srgbClr val="EBD4AD"/>
+          </a:solidFill>
+          <a:ln>
+            <a:noFill/>
+          </a:ln>
+        </p:spPr>
+        <p:txBody>
+          <a:bodyPr rtlCol="0" anchor="ctr"/>
+          <a:lstStyle/>
+          <a:p>
+            <a:pPr algn="ctr"/>
+          </a:p>
+        </p:txBody>
+      </p:sp>
+      <p:sp>
+        <p:nvSpPr>
+          <p:cNvPr id="5" name="라벨"/>
+          <p:cNvSpPr txBox="1"/>
+          <p:nvPr/>
+        </p:nvSpPr>
+        <p:spPr>
+          <a:xfrm>
+            <a:off x="731520" y="4572000"/>
+            <a:ext cx="5394960" cy="274320"/>
           </a:xfrm>
           <a:prstGeom prst="rect">
             <a:avLst/>
           </a:prstGeom>
-        </p:spPr>
-      </p:pic>
+          <a:noFill/>
+        </p:spPr>
+        <p:txBody>
+          <a:bodyPr wrap="square" lIns="54864" rIns="54864" tIns="27432" bIns="27432" anchor="t">
+            <a:noAutofit/>
+          </a:bodyPr>
+          <a:lstStyle/>
+          <a:p>
+            <a:pPr algn="ctr">
+              <a:lnSpc>
+                <a:spcPct val="115000"/>
+              </a:lnSpc>
+            </a:pPr>
+            <a:r>
+              <a:rPr sz="1000" b="1" i="0" spc="250">
+                <a:solidFill>
+                  <a:srgbClr val="26231F"/>
+                </a:solidFill>
+              </a:rPr>
+              <a:t>CARD NEWS</a:t>
+            </a:r>
+          </a:p>
+        </p:txBody>
+      </p:sp>
       <p:sp>
         <p:nvSpPr>
           <p:cNvPr id="2" name="Title 1"/>
@@ -4666,8 +5161,8 @@
         </p:nvSpPr>
         <p:spPr>
           <a:xfrm>
-            <a:off x="685800" y="960120"/>
-            <a:ext cx="5486400" cy="1463040"/>
+            <a:off x="731520" y="4892040"/>
+            <a:ext cx="5394960" cy="914400"/>
           </a:xfrm>
         </p:spPr>
         <p:txBody>
@@ -4676,7 +5171,7 @@
           </a:bodyPr>
           <a:lstStyle/>
           <a:p>
-            <a:pPr algn="l">
+            <a:pPr algn="ctr">
               <a:lnSpc>
                 <a:spcPct val="105000"/>
               </a:lnSpc>
@@ -4684,7 +5179,7 @@
             <a:r>
               <a:rPr sz="2800" b="1" i="0">
                 <a:solidFill>
-                  <a:srgbClr val="6E481C"/>
+                  <a:srgbClr val="26231F"/>
                 </a:solidFill>
               </a:rPr>
               <a:t>저장해 두고 필요할 때 꺼내 보세요</a:t>
@@ -4694,14 +5189,14 @@
       </p:sp>
       <p:sp>
         <p:nvSpPr>
-          <p:cNvPr id="4" name="한 줄 문구"/>
+          <p:cNvPr id="6" name="한 줄 문구"/>
           <p:cNvSpPr txBox="1"/>
           <p:nvPr/>
         </p:nvSpPr>
         <p:spPr>
           <a:xfrm>
-            <a:off x="685800" y="2560320"/>
-            <a:ext cx="5486400" cy="822960"/>
+            <a:off x="731520" y="5806440"/>
+            <a:ext cx="5394960" cy="822960"/>
           </a:xfrm>
           <a:prstGeom prst="rect">
             <a:avLst/>
@@ -4714,15 +5209,15 @@
           </a:bodyPr>
           <a:lstStyle/>
           <a:p>
-            <a:pPr algn="l">
+            <a:pPr algn="ctr">
               <a:lnSpc>
                 <a:spcPct val="115000"/>
               </a:lnSpc>
             </a:pPr>
             <a:r>
-              <a:rPr sz="1500" b="0" i="1">
+              <a:rPr sz="1500" b="0" i="0">
                 <a:solidFill>
-                  <a:srgbClr val="6E481C"/>
+                  <a:srgbClr val="26231F"/>
                 </a:solidFill>
               </a:rPr>
               <a:t>마음에 들면 공유해 주세요</a:t>
@@ -4732,14 +5227,14 @@
       </p:sp>
       <p:sp>
         <p:nvSpPr>
-          <p:cNvPr id="5" name="안내 문구"/>
+          <p:cNvPr id="7" name="안내 문구"/>
           <p:cNvSpPr txBox="1"/>
           <p:nvPr/>
         </p:nvSpPr>
         <p:spPr>
           <a:xfrm>
-            <a:off x="685800" y="3429000"/>
-            <a:ext cx="5486400" cy="914400"/>
+            <a:off x="731520" y="6675120"/>
+            <a:ext cx="5394960" cy="914400"/>
           </a:xfrm>
           <a:prstGeom prst="rect">
             <a:avLst/>
@@ -4752,7 +5247,7 @@
           </a:bodyPr>
           <a:lstStyle/>
           <a:p>
-            <a:pPr algn="l">
+            <a:pPr algn="ctr">
               <a:lnSpc>
                 <a:spcPct val="115000"/>
               </a:lnSpc>
@@ -4760,7 +5255,7 @@
             <a:r>
               <a:rPr sz="1200" b="0" i="0">
                 <a:solidFill>
-                  <a:srgbClr val="666666"/>
+                  <a:srgbClr val="26231F"/>
                 </a:solidFill>
               </a:rPr>
               <a:t>이름 · 연락처를 입력하세요</a:t>
@@ -4787,34 +5282,34 @@
         <a:sysClr val="window" lastClr="FFFFFF"/>
       </a:lt1>
       <a:dk2>
-        <a:srgbClr val="6E481C"/>
+        <a:srgbClr val="493D27"/>
       </a:dk2>
       <a:lt2>
-        <a:srgbClr val="FEFAF6"/>
+        <a:srgbClr val="FBF6EC"/>
       </a:lt2>
       <a:accent1>
-        <a:srgbClr val="EC9A3C"/>
+        <a:srgbClr val="E1C698"/>
       </a:accent1>
       <a:accent2>
-        <a:srgbClr val="1990E6"/>
+        <a:srgbClr val="E5EAB8"/>
       </a:accent2>
       <a:accent3>
-        <a:srgbClr val="6E481C"/>
+        <a:srgbClr val="493D27"/>
       </a:accent3>
       <a:accent4>
-        <a:srgbClr val="FDEEDD"/>
+        <a:srgbClr val="F6EAD5"/>
       </a:accent4>
       <a:accent5>
-        <a:srgbClr val="829591"/>
+        <a:srgbClr val="E3D8A8"/>
       </a:accent5>
       <a:accent6>
-        <a:srgbClr val="A89177"/>
+        <a:srgbClr val="928B7D"/>
       </a:accent6>
       <a:hlink>
-        <a:srgbClr val="EC9A3C"/>
+        <a:srgbClr val="E1C698"/>
       </a:hlink>
       <a:folHlink>
-        <a:srgbClr val="6E481C"/>
+        <a:srgbClr val="493D27"/>
       </a:folHlink>
     </a:clrScheme>
     <a:fontScheme name="Office">
